--- a/dist/초2/음악·미술/관찰과표현/초2_음악·미술_관찰과표현_01_자세히보고그리기.pptx
+++ b/dist/초2/음악·미술/관찰과표현/초2_음악·미술_관찰과표현_01_자세히보고그리기.pptx
@@ -114,34 +114,34 @@
   <p:extLst>
     <p:ext uri="{521415D9-36F7-43E2-AB2F-B90AF26B5E84}">
       <p14:sectionLst xmlns:p14="http://schemas.microsoft.com/office/powerpoint/2010/main">
-        <p14:section name="도입" id="{f9bc3f10-6090-4f50-5b05-d90522db894d}">
+        <p14:section name="도입" id="{626260aa-9e72-b085-b0ff-df83f5c98e8d}">
           <p14:sldIdLst>
             <p14:sldId id="256"/>
             <p14:sldId id="257"/>
           </p14:sldIdLst>
         </p14:section>
-        <p14:section name="개념" id="{d30c12ec-6c25-bd06-6f11-417fe9505ba6}">
+        <p14:section name="개념" id="{615e0e58-5c0a-4472-8bb7-4fda509542da}">
           <p14:sldIdLst>
             <p14:sldId id="258"/>
           </p14:sldIdLst>
         </p14:section>
-        <p14:section name="연습" id="{fec38499-49ca-da8f-dab5-301c632b7660}">
+        <p14:section name="연습" id="{78058797-f650-26cd-64d9-71dc1bb90779}">
           <p14:sldIdLst>
             <p14:sldId id="259"/>
             <p14:sldId id="260"/>
           </p14:sldIdLst>
         </p14:section>
-        <p14:section name="확인" id="{25a8e46b-3cea-7418-ca89-d899f21841bb}">
+        <p14:section name="확인" id="{0d5930c8-02d0-38a5-f6ad-14eb7516d007}">
           <p14:sldIdLst>
             <p14:sldId id="261"/>
           </p14:sldIdLst>
         </p14:section>
-        <p14:section name="정리" id="{e637d1e2-8c2d-0a00-1fa9-0874f4fdee47}">
+        <p14:section name="정리" id="{e6beaf77-7ae8-737e-8da2-b22a96322790}">
           <p14:sldIdLst>
             <p14:sldId id="262"/>
           </p14:sldIdLst>
         </p14:section>
-        <p14:section name="보충" id="{9b6de165-9f10-b7ee-dbf8-0f68f3898c00}">
+        <p14:section name="보충" id="{3ee4db81-96b8-4f87-177d-a6e25c21ae2e}">
           <p14:sldIdLst>
             <p14:sldId id="263"/>
           </p14:sldIdLst>
@@ -649,7 +649,7 @@
             <a:r>
               <a:rPr lang="en-US" dirty="0"/>
               <a:t>[S02 · 선수 확인(선 긋기와 기본 모양)]
-목적: 물건을 보고 그릴 때 쓰는 선 긋기와 기본 모양 그리기를 할 수 있는지 확인합니다. 이 차시는 계획상 앞 차시가 없으므로, 1학년 ‘색·선·모양 탐색’에서 해 온 선 긋기를 확인합니다.
+목적: 물건을 보고 그릴 때 쓰는 선 긋기와 기본 모양 그리기를 할 수 있는지 확인합니다. 계획상 선수 차시인 1학년 ‘색·선·모양 탐색’에서 해 온 선 긋기를 확인합니다.
 시간: 약 3분
 이렇게 말해 보세요
 - “연필로 곧은 선을 쭉 그어 볼까? 이번엔 구불구불한 선!”
@@ -1273,7 +1273,7 @@
 - 테두리를 끝까지 이어 그리고, 물건을 보고 안쪽 무늬나 선을 하나 이상 더하면 맞습니다.
 막히면
 - 부모가 아이 손 위에 손을 얹고 천천히 함께 따라 그립니다. 굵고 짧은 크레파스가 쥐기 쉽습니다.
-- 이 차시는 계획상 앞 차시가 없습니다. 선 긋기가 계속 어려우면 1학년 ‘색·선·모양 탐색’의 따라 긋기를 며칠 동안 짧게 한 뒤 S03부터 다시 합니다.
+- 계획상 선수 차시는 1학년 ‘색·선·모양 탐색’입니다. 선 긋기가 계속 어려우면 그 차시의 따라 긋기(보충 장과 활동지 1)를 며칠 동안 짧게 한 뒤 S03부터 다시 합니다.
 주의
 - 종이를 테이프로 탁자에 붙여 두면 움직이지 않아 그리기 쉽습니다.</a:t>
             </a:r>

--- a/dist/초2/음악·미술/관찰과표현/초2_음악·미술_관찰과표현_01_자세히보고그리기.pptx
+++ b/dist/초2/음악·미술/관찰과표현/초2_음악·미술_관찰과표현_01_자세히보고그리기.pptx
@@ -114,34 +114,34 @@
   <p:extLst>
     <p:ext uri="{521415D9-36F7-43E2-AB2F-B90AF26B5E84}">
       <p14:sectionLst xmlns:p14="http://schemas.microsoft.com/office/powerpoint/2010/main">
-        <p14:section name="도입" id="{626260aa-9e72-b085-b0ff-df83f5c98e8d}">
+        <p14:section name="도입" id="{22ab2b0e-451c-6891-379e-c005c98a32a8}">
           <p14:sldIdLst>
             <p14:sldId id="256"/>
             <p14:sldId id="257"/>
           </p14:sldIdLst>
         </p14:section>
-        <p14:section name="개념" id="{615e0e58-5c0a-4472-8bb7-4fda509542da}">
+        <p14:section name="개념" id="{e9d3e8e7-290a-8e2b-5eb0-6e5fa7514eb3}">
           <p14:sldIdLst>
             <p14:sldId id="258"/>
           </p14:sldIdLst>
         </p14:section>
-        <p14:section name="연습" id="{78058797-f650-26cd-64d9-71dc1bb90779}">
+        <p14:section name="연습" id="{d8e68cdc-97c0-93ae-051d-b38cf52c17d8}">
           <p14:sldIdLst>
             <p14:sldId id="259"/>
             <p14:sldId id="260"/>
           </p14:sldIdLst>
         </p14:section>
-        <p14:section name="확인" id="{0d5930c8-02d0-38a5-f6ad-14eb7516d007}">
+        <p14:section name="확인" id="{0c7fb083-f142-7c50-7126-b069c9e5b61d}">
           <p14:sldIdLst>
             <p14:sldId id="261"/>
           </p14:sldIdLst>
         </p14:section>
-        <p14:section name="정리" id="{e6beaf77-7ae8-737e-8da2-b22a96322790}">
+        <p14:section name="정리" id="{6268cf67-37d1-28bc-cf42-c89b4cb6d622}">
           <p14:sldIdLst>
             <p14:sldId id="262"/>
           </p14:sldIdLst>
         </p14:section>
-        <p14:section name="보충" id="{3ee4db81-96b8-4f87-177d-a6e25c21ae2e}">
+        <p14:section name="보충" id="{08ba34cd-3712-1c97-e7ee-749d39bee5b6}">
           <p14:sldIdLst>
             <p14:sldId id="263"/>
           </p14:sldIdLst>
